--- a/word-drafts/figures/AAS-Fig3-AspectBases.pptx
+++ b/word-drafts/figures/AAS-Fig3-AspectBases.pptx
@@ -3701,7 +3701,7 @@
         <p:spPr>
           <a:xfrm>
             <a:off x="4595812" y="1228725"/>
-            <a:ext cx="485775" cy="123825"/>
+            <a:ext cx="609600" cy="123825"/>
           </a:xfrm>
           <a:prstGeom prst="rect">
             <a:avLst/>
@@ -3773,7 +3773,7 @@
         <p:spPr>
           <a:xfrm>
             <a:off x="5881687" y="1228725"/>
-            <a:ext cx="485775" cy="123825"/>
+            <a:ext cx="609600" cy="123825"/>
           </a:xfrm>
           <a:prstGeom prst="rect">
             <a:avLst/>
@@ -3845,7 +3845,7 @@
         <p:spPr>
           <a:xfrm>
             <a:off x="7167562" y="1228725"/>
-            <a:ext cx="485775" cy="123825"/>
+            <a:ext cx="609600" cy="123825"/>
           </a:xfrm>
           <a:prstGeom prst="rect">
             <a:avLst/>
@@ -3917,7 +3917,7 @@
         <p:spPr>
           <a:xfrm>
             <a:off x="8453437" y="1228725"/>
-            <a:ext cx="485775" cy="123825"/>
+            <a:ext cx="609600" cy="123825"/>
           </a:xfrm>
           <a:prstGeom prst="rect">
             <a:avLst/>
@@ -3989,7 +3989,7 @@
         <p:spPr>
           <a:xfrm>
             <a:off x="2024062" y="2314575"/>
-            <a:ext cx="495300" cy="123825"/>
+            <a:ext cx="619125" cy="123825"/>
           </a:xfrm>
           <a:prstGeom prst="rect">
             <a:avLst/>
@@ -4061,7 +4061,7 @@
         <p:spPr>
           <a:xfrm>
             <a:off x="3309937" y="2314575"/>
-            <a:ext cx="495300" cy="123825"/>
+            <a:ext cx="619125" cy="123825"/>
           </a:xfrm>
           <a:prstGeom prst="rect">
             <a:avLst/>
@@ -4133,7 +4133,7 @@
         <p:spPr>
           <a:xfrm>
             <a:off x="5881687" y="2314575"/>
-            <a:ext cx="495300" cy="123825"/>
+            <a:ext cx="619125" cy="123825"/>
           </a:xfrm>
           <a:prstGeom prst="rect">
             <a:avLst/>
@@ -4205,7 +4205,7 @@
         <p:spPr>
           <a:xfrm>
             <a:off x="8453437" y="2314575"/>
-            <a:ext cx="495300" cy="123825"/>
+            <a:ext cx="619125" cy="123825"/>
           </a:xfrm>
           <a:prstGeom prst="rect">
             <a:avLst/>
@@ -4277,7 +4277,7 @@
         <p:spPr>
           <a:xfrm>
             <a:off x="11025187" y="2314575"/>
-            <a:ext cx="495300" cy="123825"/>
+            <a:ext cx="619125" cy="123825"/>
           </a:xfrm>
           <a:prstGeom prst="rect">
             <a:avLst/>
